--- a/assets/powerpoints/module-n1-inscription/A2-treize-ou-trente.pptx
+++ b/assets/powerpoints/module-n1-inscription/A2-treize-ou-trente.pptx
@@ -10235,7 +10235,43 @@
                 </a:solidFill>
                 <a:latin typeface="Verdana"/>
               </a:rPr>
-              <a:t>Les petits nombres — 13, 14, 15, 16 — finissent tous par le son &lt;b&gt;ze&lt;/b&gt;, qui vibre. Les dizaines — 30, 40, 50, 60 — finissent toutes par le son &lt;b&gt;te&lt;/b&gt;, un petit coup sec. « Quat… » tout seul ne dit rien : il faut attendre la fin du mot.</a:t>
+              <a:t>Les petits nombres — 13, 14, 15, 16 — finissent tous par le son </a:t>
+            </a:r>
+            <a:r>
+              <a:rPr sz="2000" b="1" i="0">
+                <a:solidFill>
+                  <a:srgbClr val="4B4F52"/>
+                </a:solidFill>
+                <a:latin typeface="Verdana"/>
+              </a:rPr>
+              <a:t>ze</a:t>
+            </a:r>
+            <a:r>
+              <a:rPr sz="2000" b="0" i="0">
+                <a:solidFill>
+                  <a:srgbClr val="4B4F52"/>
+                </a:solidFill>
+                <a:latin typeface="Verdana"/>
+              </a:rPr>
+              <a:t>, qui vibre. Les dizaines — 30, 40, 50, 60 — finissent toutes par le son </a:t>
+            </a:r>
+            <a:r>
+              <a:rPr sz="2000" b="1" i="0">
+                <a:solidFill>
+                  <a:srgbClr val="4B4F52"/>
+                </a:solidFill>
+                <a:latin typeface="Verdana"/>
+              </a:rPr>
+              <a:t>te</a:t>
+            </a:r>
+            <a:r>
+              <a:rPr sz="2000" b="0" i="0">
+                <a:solidFill>
+                  <a:srgbClr val="4B4F52"/>
+                </a:solidFill>
+                <a:latin typeface="Verdana"/>
+              </a:rPr>
+              <a:t>, un petit coup sec. « Quat… » tout seul ne dit rien : il faut attendre la fin du mot.</a:t>
             </a:r>
           </a:p>
         </p:txBody>
